--- a/assets/pptx/catalog-426.pptx
+++ b/assets/pptx/catalog-426.pptx
@@ -3313,7 +3313,7 @@
                 <a:ea typeface="Ebrima"/>
                 <a:cs typeface="Ebrima"/>
               </a:rPr>
-              <a:t>ይሟሟሉ ይቀልጣሉ መገኘትህን ሲረዱ የከበዱት ዙፋን ስጡኝ ያሉ ለቀው ሄዱ እያፈሩ (2x)</a:t>
+              <a:t>ይሟሟሉ ይቀልጣሉ መገኘትህን ሲረዱ የከበዱት ዙፋን ስጡኝ ያሉ ለቀው ሄዱ እያፈሩ 2x</a:t>
             </a:r>
           </a:p>
           <a:p>
@@ -3331,7 +3331,7 @@
                 <a:ea typeface="Ebrima"/>
                 <a:cs typeface="Ebrima"/>
               </a:rPr>
-              <a:t>እግዚአብሔር ትልቅ (4x)</a:t>
+              <a:t>እግዚአብሔር ትልቅ 4x</a:t>
             </a:r>
           </a:p>
           <a:p>
@@ -3421,7 +3421,7 @@
                 <a:ea typeface="Ebrima"/>
                 <a:cs typeface="Ebrima"/>
               </a:rPr>
-              <a:t>መንፈስ ቅዱስ ትልቅ (4x)</a:t>
+              <a:t>መንፈስ ቅዱስ ትልቅ 4x</a:t>
             </a:r>
           </a:p>
           <a:p>
@@ -3565,7 +3565,7 @@
                 <a:ea typeface="Ebrima"/>
                 <a:cs typeface="Ebrima"/>
               </a:rPr>
-              <a:t>(2x)</a:t>
+              <a:t>2x</a:t>
             </a:r>
           </a:p>
           <a:p>
@@ -3637,7 +3637,7 @@
                 <a:ea typeface="Ebrima"/>
                 <a:cs typeface="Ebrima"/>
               </a:rPr>
-              <a:t>(2x)</a:t>
+              <a:t>2x</a:t>
             </a:r>
           </a:p>
           <a:p>
@@ -3673,7 +3673,7 @@
                 <a:ea typeface="Ebrima"/>
                 <a:cs typeface="Ebrima"/>
               </a:rPr>
-              <a:t>(2x)</a:t>
+              <a:t>2x</a:t>
             </a:r>
           </a:p>
           <a:p>
@@ -3709,7 +3709,7 @@
                 <a:ea typeface="Ebrima"/>
                 <a:cs typeface="Ebrima"/>
               </a:rPr>
-              <a:t>መንፈስ ቅዱስ ትልቅ (4)</a:t>
+              <a:t>መንፈስ ቅዱስ ትልቅ 4</a:t>
             </a:r>
           </a:p>
           <a:p>
@@ -3817,7 +3817,7 @@
                 <a:ea typeface="Ebrima"/>
                 <a:cs typeface="Ebrima"/>
               </a:rPr>
-              <a:t>እንደሰም እቀልጣለሁ ሸክሜን/ችግሬን እረስቼ (2)</a:t>
+              <a:t>እንደሰም እቀልጣለሁ ሸክሜን/ችግሬን እረስቼ 2</a:t>
             </a:r>
           </a:p>
           <a:p>
@@ -3853,7 +3853,7 @@
                 <a:ea typeface="Ebrima"/>
                 <a:cs typeface="Ebrima"/>
               </a:rPr>
-              <a:t>እንደገና አሸንፎኝ ሰመጥኩ/ቀረሁ ባለህበት (2)</a:t>
+              <a:t>እንደገና አሸንፎኝ ሰመጥኩ/ቀረሁ ባለህበት 2</a:t>
             </a:r>
           </a:p>
           <a:p>
@@ -3871,7 +3871,7 @@
                 <a:ea typeface="Ebrima"/>
                 <a:cs typeface="Ebrima"/>
               </a:rPr>
-              <a:t>ነፍስም አልቀረልኝ (2)</a:t>
+              <a:t>ነፍስም አልቀረልኝ 2</a:t>
             </a:r>
           </a:p>
           <a:p>
@@ -3907,7 +3907,7 @@
                 <a:ea typeface="Ebrima"/>
                 <a:cs typeface="Ebrima"/>
               </a:rPr>
-              <a:t>እግዚያብሔር ትልቅ (4)</a:t>
+              <a:t>እግዚያብሔር ትልቅ 4</a:t>
             </a:r>
           </a:p>
         </p:txBody>
